--- a/黒崎/AI研修一覧/A-110_AIで変わる仕事の未来/スライド.pptx
+++ b/黒崎/AI研修一覧/A-110_AIで変わる仕事の未来/スライド.pptx
@@ -4066,7 +4066,7 @@
                 <a:ea typeface="Calibri" pitchFamily="34" charset="-122"/>
                 <a:cs typeface="Calibri" pitchFamily="34" charset="-120"/>
               </a:rPr>
-              <a:t>確認テスト（5問）</a:t>
+              <a:t>ご視聴ありがとうございました</a:t>
             </a:r>
             <a:endParaRPr lang="en-US" sz="2200" dirty="0"/>
           </a:p>
@@ -4128,7 +4128,7 @@
                 <a:ea typeface="Calibri" pitchFamily="34" charset="-122"/>
                 <a:cs typeface="Calibri" pitchFamily="34" charset="-120"/>
               </a:rPr>
-              <a:t>80%以上の正答で修了</a:t>
+              <a:t>次の動画もぜひご覧ください</a:t>
             </a:r>
             <a:endParaRPr lang="en-US" sz="1800" dirty="0"/>
           </a:p>
